--- a/cover-proposals/v16_1007_case2_ja/台割案2_日本語チェック用_P02-11_編集用.pptx
+++ b/cover-proposals/v16_1007_case2_ja/台割案2_日本語チェック用_P02-11_編集用.pptx
@@ -4381,7 +4381,7 @@
                 <a:ea typeface="Noto Sans JP Light" pitchFamily="34" charset="-122"/>
                 <a:cs typeface="Noto Sans JP Light" pitchFamily="34" charset="-120"/>
               </a:rPr>
-              <a:t>鉄鉱石を先頭に、世界に広がる事業と人の拠点を一覧で示します。</a:t>
+              <a:t>世界に広がる事業と人のネットワークが、新しい協業の起点になります。</a:t>
             </a:r>
             <a:endParaRPr lang="en-US" sz="740" dirty="0"/>
           </a:p>
